--- a/deck/SupplyChainIQ-Pitch-Deck.pptx
+++ b/deck/SupplyChainIQ-Pitch-Deck.pptx
@@ -3217,7 +3217,7 @@
               </a:defRPr>
             </a:pPr>
             <a:r>
-              <a:t>Team: SupplyChainIQ  |  Lead: Chirag H S  |  Track 5 Prototype Submission  |  Snowflake GCC Edition</a:t>
+              <a:t>Team: Aegis  |  Project: SupplyChainIQ  |  Lead: Chirag H S  |  Track 5 Prototype Submission  |  Snowflake GCC Edition</a:t>
             </a:r>
           </a:p>
         </p:txBody>
